--- a/assets/pptx/catalog-589.pptx
+++ b/assets/pptx/catalog-589.pptx
@@ -3264,7 +3264,7 @@
                 <a:ea typeface="Ebrima"/>
                 <a:cs typeface="Ebrima"/>
               </a:rPr>
-              <a:t>መዳኔ ብቻ በቂ ነዉ ለእኔ ለመዘመር (2x)</a:t>
+              <a:t>መዳኔ ብቻ በቂ ነዉ ለእኔ ለመዘመር 2x</a:t>
             </a:r>
           </a:p>
         </p:txBody>
@@ -3560,7 +3560,7 @@
                 <a:ea typeface="Ebrima"/>
                 <a:cs typeface="Ebrima"/>
               </a:rPr>
-              <a:t>ለእርሱ ዘምሩ ይዘምሩ (2x)</a:t>
+              <a:t>ለእርሱ ዘምሩ ይዘምሩ 2x</a:t>
             </a:r>
           </a:p>
         </p:txBody>
@@ -3645,7 +3645,7 @@
                 <a:ea typeface="Ebrima"/>
                 <a:cs typeface="Ebrima"/>
               </a:rPr>
-              <a:t>መዳኔ ብቻ በቂ ነዉ ለእኔ ለመዘመር (2x)</a:t>
+              <a:t>መዳኔ ብቻ በቂ ነዉ ለእኔ ለመዘመር 2x</a:t>
             </a:r>
           </a:p>
         </p:txBody>
@@ -3941,7 +3941,7 @@
                 <a:ea typeface="Ebrima"/>
                 <a:cs typeface="Ebrima"/>
               </a:rPr>
-              <a:t>ለእርሱ ዘምሩ ይዘምሩ (2x)</a:t>
+              <a:t>ለእርሱ ዘምሩ ይዘምሩ 2x</a:t>
             </a:r>
           </a:p>
         </p:txBody>
